--- a/docs/customer-documents/federal-aan-series/Vol_IX_Book_02_FedAAN_Landing_Zone_Front_Door.pptx
+++ b/docs/customer-documents/federal-aan-series/Vol_IX_Book_02_FedAAN_Landing_Zone_Front_Door.pptx
@@ -959,7 +959,7 @@
           <a:p/>
           <a:p>
             <a:r>
-              <a:t>Vendor sources: uiao repo: infoblox-ddi-book/servicenow-app/</a:t>
+              <a:t>Vendor sources: host repo: infoblox-ddi-book/servicenow-app/</a:t>
             </a:r>
           </a:p>
         </p:txBody>
